--- a/Pressure and Temparture/pressure-and-temperature_presentation.pptx
+++ b/Pressure and Temparture/pressure-and-temperature_presentation.pptx
@@ -289,7 +289,7 @@
           <a:p>
             <a:fld id="{48A87A34-81AB-432B-8DAE-1953F412C126}" type="datetimeFigureOut">
               <a:rPr lang="en-US" dirty="0"/>
-              <a:t>3/1/2026</a:t>
+              <a:t>5/4/26</a:t>
             </a:fld>
             <a:endParaRPr lang="en-US" dirty="0"/>
           </a:p>
@@ -596,7 +596,7 @@
           <a:p>
             <a:fld id="{48A87A34-81AB-432B-8DAE-1953F412C126}" type="datetimeFigureOut">
               <a:rPr lang="en-US" dirty="0"/>
-              <a:t>3/1/2026</a:t>
+              <a:t>5/4/26</a:t>
             </a:fld>
             <a:endParaRPr lang="en-US" dirty="0"/>
           </a:p>
@@ -813,7 +813,7 @@
           <a:p>
             <a:fld id="{48A87A34-81AB-432B-8DAE-1953F412C126}" type="datetimeFigureOut">
               <a:rPr lang="en-US" dirty="0"/>
-              <a:t>3/1/2026</a:t>
+              <a:t>5/4/26</a:t>
             </a:fld>
             <a:endParaRPr lang="en-US" dirty="0"/>
           </a:p>
@@ -1099,7 +1099,7 @@
           <a:p>
             <a:fld id="{48A87A34-81AB-432B-8DAE-1953F412C126}" type="datetimeFigureOut">
               <a:rPr lang="en-US" dirty="0"/>
-              <a:t>3/1/2026</a:t>
+              <a:t>5/4/26</a:t>
             </a:fld>
             <a:endParaRPr lang="en-US" dirty="0"/>
           </a:p>
@@ -1548,7 +1548,7 @@
           <a:p>
             <a:fld id="{48A87A34-81AB-432B-8DAE-1953F412C126}" type="datetimeFigureOut">
               <a:rPr lang="en-US" dirty="0"/>
-              <a:t>3/1/2026</a:t>
+              <a:t>5/4/26</a:t>
             </a:fld>
             <a:endParaRPr lang="en-US" dirty="0"/>
           </a:p>
@@ -2119,7 +2119,7 @@
           <a:p>
             <a:fld id="{48A87A34-81AB-432B-8DAE-1953F412C126}" type="datetimeFigureOut">
               <a:rPr lang="en-US" dirty="0"/>
-              <a:t>3/1/2026</a:t>
+              <a:t>5/4/26</a:t>
             </a:fld>
             <a:endParaRPr lang="en-US" dirty="0"/>
           </a:p>
@@ -2966,7 +2966,7 @@
           <a:p>
             <a:fld id="{48A87A34-81AB-432B-8DAE-1953F412C126}" type="datetimeFigureOut">
               <a:rPr lang="en-US" dirty="0"/>
-              <a:t>3/1/2026</a:t>
+              <a:t>5/4/26</a:t>
             </a:fld>
             <a:endParaRPr lang="en-US" dirty="0"/>
           </a:p>
@@ -3166,7 +3166,7 @@
           <a:p>
             <a:fld id="{48A87A34-81AB-432B-8DAE-1953F412C126}" type="datetimeFigureOut">
               <a:rPr lang="en-US" dirty="0"/>
-              <a:t>3/1/2026</a:t>
+              <a:t>5/4/26</a:t>
             </a:fld>
             <a:endParaRPr lang="en-US" dirty="0"/>
           </a:p>
@@ -3375,7 +3375,7 @@
           <a:p>
             <a:fld id="{48A87A34-81AB-432B-8DAE-1953F412C126}" type="datetimeFigureOut">
               <a:rPr lang="en-US" dirty="0"/>
-              <a:t>3/1/2026</a:t>
+              <a:t>5/4/26</a:t>
             </a:fld>
             <a:endParaRPr lang="en-US" dirty="0"/>
           </a:p>
@@ -3575,7 +3575,7 @@
           <a:p>
             <a:fld id="{48A87A34-81AB-432B-8DAE-1953F412C126}" type="datetimeFigureOut">
               <a:rPr lang="en-US" dirty="0"/>
-              <a:t>3/1/2026</a:t>
+              <a:t>5/4/26</a:t>
             </a:fld>
             <a:endParaRPr lang="en-US" dirty="0"/>
           </a:p>
@@ -3850,7 +3850,7 @@
           <a:p>
             <a:fld id="{48A87A34-81AB-432B-8DAE-1953F412C126}" type="datetimeFigureOut">
               <a:rPr lang="en-US" dirty="0"/>
-              <a:t>3/1/2026</a:t>
+              <a:t>5/4/26</a:t>
             </a:fld>
             <a:endParaRPr lang="en-US" dirty="0"/>
           </a:p>
@@ -4112,7 +4112,7 @@
           <a:p>
             <a:fld id="{48A87A34-81AB-432B-8DAE-1953F412C126}" type="datetimeFigureOut">
               <a:rPr lang="en-US" dirty="0"/>
-              <a:t>3/1/2026</a:t>
+              <a:t>5/4/26</a:t>
             </a:fld>
             <a:endParaRPr lang="en-US" dirty="0"/>
           </a:p>
@@ -4522,7 +4522,7 @@
           <a:p>
             <a:fld id="{48A87A34-81AB-432B-8DAE-1953F412C126}" type="datetimeFigureOut">
               <a:rPr lang="en-US" dirty="0"/>
-              <a:t>3/1/2026</a:t>
+              <a:t>5/4/26</a:t>
             </a:fld>
             <a:endParaRPr lang="en-US" dirty="0"/>
           </a:p>
@@ -4665,7 +4665,7 @@
           <a:p>
             <a:fld id="{48A87A34-81AB-432B-8DAE-1953F412C126}" type="datetimeFigureOut">
               <a:rPr lang="en-US" dirty="0"/>
-              <a:t>3/1/2026</a:t>
+              <a:t>5/4/26</a:t>
             </a:fld>
             <a:endParaRPr lang="en-US" dirty="0"/>
           </a:p>
@@ -4785,7 +4785,7 @@
           <a:p>
             <a:fld id="{48A87A34-81AB-432B-8DAE-1953F412C126}" type="datetimeFigureOut">
               <a:rPr lang="en-US" dirty="0"/>
-              <a:t>3/1/2026</a:t>
+              <a:t>5/4/26</a:t>
             </a:fld>
             <a:endParaRPr lang="en-US" dirty="0"/>
           </a:p>
@@ -5059,7 +5059,7 @@
           <a:p>
             <a:fld id="{48A87A34-81AB-432B-8DAE-1953F412C126}" type="datetimeFigureOut">
               <a:rPr lang="en-US" dirty="0"/>
-              <a:t>3/1/2026</a:t>
+              <a:t>5/4/26</a:t>
             </a:fld>
             <a:endParaRPr lang="en-US" dirty="0"/>
           </a:p>
@@ -5366,7 +5366,7 @@
           <a:p>
             <a:fld id="{48A87A34-81AB-432B-8DAE-1953F412C126}" type="datetimeFigureOut">
               <a:rPr lang="en-US" dirty="0"/>
-              <a:t>3/1/2026</a:t>
+              <a:t>5/4/26</a:t>
             </a:fld>
             <a:endParaRPr lang="en-US" dirty="0"/>
           </a:p>
@@ -5615,7 +5615,7 @@
             <a:fld id="{48A87A34-81AB-432B-8DAE-1953F412C126}" type="datetimeFigureOut">
               <a:rPr lang="en-US" dirty="0"/>
               <a:pPr/>
-              <a:t>3/1/2026</a:t>
+              <a:t>5/4/26</a:t>
             </a:fld>
             <a:endParaRPr lang="en-US" dirty="0"/>
           </a:p>
@@ -6447,8 +6447,8 @@
           </a:p>
         </p:txBody>
       </p:sp>
-      <mc:AlternateContent xmlns:mc="http://schemas.openxmlformats.org/markup-compatibility/2006">
-        <mc:Choice xmlns:a14="http://schemas.microsoft.com/office/drawing/2010/main" Requires="a14">
+      <mc:AlternateContent xmlns:mc="http://schemas.openxmlformats.org/markup-compatibility/2006" xmlns:a14="http://schemas.microsoft.com/office/drawing/2010/main">
+        <mc:Choice Requires="a14">
           <p:sp>
             <p:nvSpPr>
               <p:cNvPr id="4" name="Text Placeholder 3">
@@ -6735,7 +6735,7 @@
             </p:txBody>
           </p:sp>
         </mc:Choice>
-        <mc:Fallback>
+        <mc:Fallback xmlns="">
           <p:sp>
             <p:nvSpPr>
               <p:cNvPr id="4" name="Text Placeholder 3">
@@ -6882,8 +6882,8 @@
           </a:p>
         </p:txBody>
       </p:sp>
-      <mc:AlternateContent xmlns:mc="http://schemas.openxmlformats.org/markup-compatibility/2006">
-        <mc:Choice xmlns:a14="http://schemas.microsoft.com/office/drawing/2010/main" Requires="a14">
+      <mc:AlternateContent xmlns:mc="http://schemas.openxmlformats.org/markup-compatibility/2006" xmlns:a14="http://schemas.microsoft.com/office/drawing/2010/main">
+        <mc:Choice Requires="a14">
           <p:sp>
             <p:nvSpPr>
               <p:cNvPr id="4" name="Text Placeholder 3">
@@ -7122,7 +7122,7 @@
             </p:txBody>
           </p:sp>
         </mc:Choice>
-        <mc:Fallback>
+        <mc:Fallback xmlns="">
           <p:sp>
             <p:nvSpPr>
               <p:cNvPr id="4" name="Text Placeholder 3">
@@ -7190,7 +7190,7 @@
         </p:blipFill>
         <p:spPr>
           <a:xfrm>
-            <a:off x="5078413" y="1519526"/>
+            <a:off x="5079038" y="1748126"/>
             <a:ext cx="6199187" cy="3361748"/>
           </a:xfrm>
           <a:prstGeom prst="rect">
@@ -7269,8 +7269,8 @@
           </a:p>
         </p:txBody>
       </p:sp>
-      <mc:AlternateContent xmlns:mc="http://schemas.openxmlformats.org/markup-compatibility/2006">
-        <mc:Choice xmlns:a14="http://schemas.microsoft.com/office/drawing/2010/main" Requires="a14">
+      <mc:AlternateContent xmlns:mc="http://schemas.openxmlformats.org/markup-compatibility/2006" xmlns:a14="http://schemas.microsoft.com/office/drawing/2010/main">
+        <mc:Choice Requires="a14">
           <p:sp>
             <p:nvSpPr>
               <p:cNvPr id="4" name="Text Placeholder 3">
@@ -7370,13 +7370,13 @@
                       <a:rPr lang="en-US" b="0" i="1" cap="none" smtClean="0">
                         <a:latin typeface="Cambria Math" panose="02040503050406030204" pitchFamily="18" charset="0"/>
                       </a:rPr>
-                      <m:t>=0.00</m:t>
+                      <m:t>=0.003572</m:t>
                     </m:r>
                     <m:r>
                       <a:rPr lang="en-US" i="1" cap="none">
                         <a:latin typeface="Cambria Math" panose="02040503050406030204" pitchFamily="18" charset="0"/>
                       </a:rPr>
-                      <m:t>3572 </m:t>
+                      <m:t> </m:t>
                     </m:r>
                     <m:sSup>
                       <m:sSupPr>
@@ -7869,7 +7869,7 @@
             </p:txBody>
           </p:sp>
         </mc:Choice>
-        <mc:Fallback>
+        <mc:Fallback xmlns="">
           <p:sp>
             <p:nvSpPr>
               <p:cNvPr id="4" name="Text Placeholder 3">
@@ -8346,15 +8346,6 @@
 </file>
 
 <file path=customXml/item1.xml><?xml version="1.0" encoding="utf-8"?>
-<?mso-contentType ?>
-<FormTemplates xmlns="http://schemas.microsoft.com/sharepoint/v3/contenttype/forms">
-  <Display>DocumentLibraryForm</Display>
-  <Edit>DocumentLibraryForm</Edit>
-  <New>DocumentLibraryForm</New>
-</FormTemplates>
-</file>
-
-<file path=customXml/item2.xml><?xml version="1.0" encoding="utf-8"?>
 <ct:contentTypeSchema xmlns:ct="http://schemas.microsoft.com/office/2006/metadata/contentType" xmlns:ma="http://schemas.microsoft.com/office/2006/metadata/properties/metaAttributes" ct:_="" ma:_="" ma:contentTypeName="Document" ma:contentTypeID="0x010100300CEFF5852D694286F2BC0CE7A6C997" ma:contentTypeVersion="6" ma:contentTypeDescription="Create a new document." ma:contentTypeScope="" ma:versionID="526a12cdb4104c8474d1a1c7b98d28ce">
   <xsd:schema xmlns:xsd="http://www.w3.org/2001/XMLSchema" xmlns:xs="http://www.w3.org/2001/XMLSchema" xmlns:p="http://schemas.microsoft.com/office/2006/metadata/properties" xmlns:ns3="c64525cb-669c-474a-bb1c-a1df3ff42bd0" targetNamespace="http://schemas.microsoft.com/office/2006/metadata/properties" ma:root="true" ma:fieldsID="bbbd96e4c2bf71238f876c69fa445afd" ns3:_="">
     <xsd:import namespace="c64525cb-669c-474a-bb1c-a1df3ff42bd0"/>
@@ -8510,6 +8501,15 @@
 </ct:contentTypeSchema>
 </file>
 
+<file path=customXml/item2.xml><?xml version="1.0" encoding="utf-8"?>
+<?mso-contentType ?>
+<FormTemplates xmlns="http://schemas.microsoft.com/sharepoint/v3/contenttype/forms">
+  <Display>DocumentLibraryForm</Display>
+  <Edit>DocumentLibraryForm</Edit>
+  <New>DocumentLibraryForm</New>
+</FormTemplates>
+</file>
+
 <file path=customXml/item3.xml><?xml version="1.0" encoding="utf-8"?>
 <p:properties xmlns:p="http://schemas.microsoft.com/office/2006/metadata/properties" xmlns:xsi="http://www.w3.org/2001/XMLSchema-instance" xmlns:pc="http://schemas.microsoft.com/office/infopath/2007/PartnerControls">
   <documentManagement>
@@ -8519,14 +8519,6 @@
 </file>
 
 <file path=customXml/itemProps1.xml><?xml version="1.0" encoding="utf-8"?>
-<ds:datastoreItem xmlns:ds="http://schemas.openxmlformats.org/officeDocument/2006/customXml" ds:itemID="{4437C8FD-C768-4F57-B223-C8CB82EB0968}">
-  <ds:schemaRefs>
-    <ds:schemaRef ds:uri="http://schemas.microsoft.com/sharepoint/v3/contenttype/forms"/>
-  </ds:schemaRefs>
-</ds:datastoreItem>
-</file>
-
-<file path=customXml/itemProps2.xml><?xml version="1.0" encoding="utf-8"?>
 <ds:datastoreItem xmlns:ds="http://schemas.openxmlformats.org/officeDocument/2006/customXml" ds:itemID="{737607DC-AD28-4B6A-9497-E6CBE4D39BA6}">
   <ds:schemaRefs>
     <ds:schemaRef ds:uri="http://schemas.microsoft.com/office/2006/metadata/contentType"/>
@@ -8540,6 +8532,14 @@
     <ds:schemaRef ds:uri="http://purl.org/dc/elements/1.1/"/>
     <ds:schemaRef ds:uri="http://purl.org/dc/terms/"/>
     <ds:schemaRef ds:uri="http://schemas.microsoft.com/internal/obd"/>
+  </ds:schemaRefs>
+</ds:datastoreItem>
+</file>
+
+<file path=customXml/itemProps2.xml><?xml version="1.0" encoding="utf-8"?>
+<ds:datastoreItem xmlns:ds="http://schemas.openxmlformats.org/officeDocument/2006/customXml" ds:itemID="{4437C8FD-C768-4F57-B223-C8CB82EB0968}">
+  <ds:schemaRefs>
+    <ds:schemaRef ds:uri="http://schemas.microsoft.com/sharepoint/v3/contenttype/forms"/>
   </ds:schemaRefs>
 </ds:datastoreItem>
 </file>
